--- a/3.4 Hoofdstuk 4 - Internationale markten/3.4.6 Paragraaf 6 - Toepassen/2. Leren/3.4.6 Toepassen – presentatie.pptx
+++ b/3.4 Hoofdstuk 4 - Internationale markten/3.4.6 Paragraaf 6 - Toepassen/2. Leren/3.4.6 Toepassen – presentatie.pptx
@@ -2294,6 +2294,10 @@
             </a:outerShdw>
           </a:effectLst>
         </p:spPr>
+        <p:txBody>
+          <a:bodyPr/>
+          <a:p/>
+        </p:txBody>
       </p:sp>
       <p:sp>
         <p:nvSpPr>
@@ -2401,6 +2405,10 @@
             </a:outerShdw>
           </a:effectLst>
         </p:spPr>
+        <p:txBody>
+          <a:bodyPr/>
+          <a:p/>
+        </p:txBody>
       </p:sp>
       <p:sp>
         <p:nvSpPr>
@@ -2421,6 +2429,10 @@
           </a:solidFill>
           <a:ln/>
         </p:spPr>
+        <p:txBody>
+          <a:bodyPr/>
+          <a:p/>
+        </p:txBody>
       </p:sp>
       <p:sp>
         <p:nvSpPr>
@@ -2489,6 +2501,10 @@
             </a:outerShdw>
           </a:effectLst>
         </p:spPr>
+        <p:txBody>
+          <a:bodyPr/>
+          <a:p/>
+        </p:txBody>
       </p:sp>
       <p:sp>
         <p:nvSpPr>
@@ -2596,6 +2612,10 @@
             </a:outerShdw>
           </a:effectLst>
         </p:spPr>
+        <p:txBody>
+          <a:bodyPr/>
+          <a:p/>
+        </p:txBody>
       </p:sp>
       <p:sp>
         <p:nvSpPr>
@@ -2616,6 +2636,10 @@
           </a:solidFill>
           <a:ln/>
         </p:spPr>
+        <p:txBody>
+          <a:bodyPr/>
+          <a:p/>
+        </p:txBody>
       </p:sp>
       <p:sp>
         <p:nvSpPr>
@@ -2684,6 +2708,10 @@
             </a:outerShdw>
           </a:effectLst>
         </p:spPr>
+        <p:txBody>
+          <a:bodyPr/>
+          <a:p/>
+        </p:txBody>
       </p:sp>
       <p:sp>
         <p:nvSpPr>
@@ -2791,6 +2819,10 @@
             </a:outerShdw>
           </a:effectLst>
         </p:spPr>
+        <p:txBody>
+          <a:bodyPr/>
+          <a:p/>
+        </p:txBody>
       </p:sp>
       <p:sp>
         <p:nvSpPr>
@@ -2811,6 +2843,10 @@
           </a:solidFill>
           <a:ln/>
         </p:spPr>
+        <p:txBody>
+          <a:bodyPr/>
+          <a:p/>
+        </p:txBody>
       </p:sp>
       <p:sp>
         <p:nvSpPr>
@@ -2879,6 +2915,10 @@
             </a:outerShdw>
           </a:effectLst>
         </p:spPr>
+        <p:txBody>
+          <a:bodyPr/>
+          <a:p/>
+        </p:txBody>
       </p:sp>
       <p:sp>
         <p:nvSpPr>
@@ -2986,6 +3026,10 @@
             </a:outerShdw>
           </a:effectLst>
         </p:spPr>
+        <p:txBody>
+          <a:bodyPr/>
+          <a:p/>
+        </p:txBody>
       </p:sp>
       <p:sp>
         <p:nvSpPr>
@@ -3006,6 +3050,10 @@
           </a:solidFill>
           <a:ln/>
         </p:spPr>
+        <p:txBody>
+          <a:bodyPr/>
+          <a:p/>
+        </p:txBody>
       </p:sp>
       <p:sp>
         <p:nvSpPr>
@@ -3138,6 +3186,10 @@
             </a:outerShdw>
           </a:effectLst>
         </p:spPr>
+        <p:txBody>
+          <a:bodyPr/>
+          <a:p/>
+        </p:txBody>
       </p:sp>
       <p:sp>
         <p:nvSpPr>
@@ -3158,6 +3210,10 @@
           </a:solidFill>
           <a:ln/>
         </p:spPr>
+        <p:txBody>
+          <a:bodyPr/>
+          <a:p/>
+        </p:txBody>
       </p:sp>
       <p:sp>
         <p:nvSpPr>
@@ -3265,6 +3321,10 @@
             </a:outerShdw>
           </a:effectLst>
         </p:spPr>
+        <p:txBody>
+          <a:bodyPr/>
+          <a:p/>
+        </p:txBody>
       </p:sp>
       <p:sp>
         <p:nvSpPr>
@@ -3285,6 +3345,10 @@
           </a:solidFill>
           <a:ln/>
         </p:spPr>
+        <p:txBody>
+          <a:bodyPr/>
+          <a:p/>
+        </p:txBody>
       </p:sp>
       <p:sp>
         <p:nvSpPr>
@@ -3392,6 +3456,10 @@
             </a:outerShdw>
           </a:effectLst>
         </p:spPr>
+        <p:txBody>
+          <a:bodyPr/>
+          <a:p/>
+        </p:txBody>
       </p:sp>
       <p:sp>
         <p:nvSpPr>
@@ -3412,6 +3480,10 @@
           </a:solidFill>
           <a:ln/>
         </p:spPr>
+        <p:txBody>
+          <a:bodyPr/>
+          <a:p/>
+        </p:txBody>
       </p:sp>
       <p:sp>
         <p:nvSpPr>
@@ -3519,6 +3591,10 @@
             </a:outerShdw>
           </a:effectLst>
         </p:spPr>
+        <p:txBody>
+          <a:bodyPr/>
+          <a:p/>
+        </p:txBody>
       </p:sp>
       <p:sp>
         <p:nvSpPr>
@@ -3539,6 +3615,10 @@
           </a:solidFill>
           <a:ln/>
         </p:spPr>
+        <p:txBody>
+          <a:bodyPr/>
+          <a:p/>
+        </p:txBody>
       </p:sp>
       <p:sp>
         <p:nvSpPr>
@@ -3763,6 +3843,8 @@
               </a:rPr>
               <a:t>Inter-industriële handel → verschillende producten (comparatief voordeel)</a:t>
             </a:r>
+          </a:p>
+          <a:p>
             <a:pPr algn="l" marL="342900" indent="-342900">
               <a:lnSpc>
                 <a:spcPct val="160000"/>
@@ -3784,6 +3866,8 @@
               </a:rPr>
               <a:t>Intra-industriële handel → dezelfde producten (productdifferentiatie)</a:t>
             </a:r>
+          </a:p>
+          <a:p>
             <a:pPr algn="l" marL="342900" indent="-342900">
               <a:lnSpc>
                 <a:spcPct val="160000"/>
@@ -3805,6 +3889,8 @@
               </a:rPr>
               <a:t>Exportwaarde = prijs × volume (volume bepaalt werkgelegenheid)</a:t>
             </a:r>
+          </a:p>
+          <a:p>
             <a:pPr algn="l" marL="342900" indent="-342900">
               <a:lnSpc>
                 <a:spcPct val="160000"/>
@@ -3826,6 +3912,8 @@
               </a:rPr>
               <a:t>Handelsbalans: export &gt; import = overschot</a:t>
             </a:r>
+          </a:p>
+          <a:p>
             <a:pPr algn="l" marL="342900" indent="-342900">
               <a:lnSpc>
                 <a:spcPct val="160000"/>
@@ -3847,6 +3935,8 @@
               </a:rPr>
               <a:t>Handelspolitiek: beschrijf de hele causale keten</a:t>
             </a:r>
+          </a:p>
+          <a:p>
             <a:pPr algn="l" marL="342900" indent="-342900">
               <a:lnSpc>
                 <a:spcPct val="160000"/>
@@ -3868,7 +3958,6 @@
               </a:rPr>
               <a:t>Globalisering: hogere lonen hoogopgeleiden, lagere lonen laagopgeleiden</a:t>
             </a:r>
-            <a:endParaRPr lang="en-US" sz="1500" dirty="0"/>
           </a:p>
         </p:txBody>
       </p:sp>
@@ -4106,6 +4195,10 @@
             </a:outerShdw>
           </a:effectLst>
         </p:spPr>
+        <p:txBody>
+          <a:bodyPr/>
+          <a:p/>
+        </p:txBody>
       </p:sp>
       <p:sp>
         <p:nvSpPr>
@@ -4126,6 +4219,10 @@
           </a:solidFill>
           <a:ln/>
         </p:spPr>
+        <p:txBody>
+          <a:bodyPr/>
+          <a:p/>
+        </p:txBody>
       </p:sp>
       <p:sp>
         <p:nvSpPr>
@@ -4233,6 +4330,10 @@
             </a:outerShdw>
           </a:effectLst>
         </p:spPr>
+        <p:txBody>
+          <a:bodyPr/>
+          <a:p/>
+        </p:txBody>
       </p:sp>
       <p:sp>
         <p:nvSpPr>
@@ -4253,6 +4354,10 @@
           </a:solidFill>
           <a:ln/>
         </p:spPr>
+        <p:txBody>
+          <a:bodyPr/>
+          <a:p/>
+        </p:txBody>
       </p:sp>
       <p:sp>
         <p:nvSpPr>
@@ -4360,6 +4465,10 @@
             </a:outerShdw>
           </a:effectLst>
         </p:spPr>
+        <p:txBody>
+          <a:bodyPr/>
+          <a:p/>
+        </p:txBody>
       </p:sp>
       <p:sp>
         <p:nvSpPr>
@@ -4380,6 +4489,10 @@
           </a:solidFill>
           <a:ln/>
         </p:spPr>
+        <p:txBody>
+          <a:bodyPr/>
+          <a:p/>
+        </p:txBody>
       </p:sp>
       <p:sp>
         <p:nvSpPr>
@@ -4487,6 +4600,10 @@
             </a:outerShdw>
           </a:effectLst>
         </p:spPr>
+        <p:txBody>
+          <a:bodyPr/>
+          <a:p/>
+        </p:txBody>
       </p:sp>
       <p:sp>
         <p:nvSpPr>
@@ -4507,6 +4624,10 @@
           </a:solidFill>
           <a:ln/>
         </p:spPr>
+        <p:txBody>
+          <a:bodyPr/>
+          <a:p/>
+        </p:txBody>
       </p:sp>
       <p:sp>
         <p:nvSpPr>
@@ -4614,6 +4735,10 @@
             </a:outerShdw>
           </a:effectLst>
         </p:spPr>
+        <p:txBody>
+          <a:bodyPr/>
+          <a:p/>
+        </p:txBody>
       </p:sp>
       <p:sp>
         <p:nvSpPr>
@@ -4634,6 +4759,10 @@
           </a:solidFill>
           <a:ln/>
         </p:spPr>
+        <p:txBody>
+          <a:bodyPr/>
+          <a:p/>
+        </p:txBody>
       </p:sp>
       <p:sp>
         <p:nvSpPr>
@@ -4741,6 +4870,10 @@
             </a:outerShdw>
           </a:effectLst>
         </p:spPr>
+        <p:txBody>
+          <a:bodyPr/>
+          <a:p/>
+        </p:txBody>
       </p:sp>
       <p:sp>
         <p:nvSpPr>
@@ -4965,6 +5098,8 @@
               </a:rPr>
               <a:t>Het verschil uitleggen tussen inter- en intra-industriële handel</a:t>
             </a:r>
+          </a:p>
+          <a:p>
             <a:pPr algn="l" marL="342900" indent="-342900">
               <a:lnSpc>
                 <a:spcPct val="150000"/>
@@ -4986,6 +5121,8 @@
               </a:rPr>
               <a:t>Opofferingskosten berekenen en comparatief voordeel bepalen</a:t>
             </a:r>
+          </a:p>
+          <a:p>
             <a:pPr algn="l" marL="342900" indent="-342900">
               <a:lnSpc>
                 <a:spcPct val="150000"/>
@@ -5007,6 +5144,8 @@
               </a:rPr>
               <a:t>De ruilvoet bepalen waarbinnen handel voordelig is</a:t>
             </a:r>
+          </a:p>
+          <a:p>
             <a:pPr algn="l" marL="342900" indent="-342900">
               <a:lnSpc>
                 <a:spcPct val="150000"/>
@@ -5028,6 +5167,8 @@
               </a:rPr>
               <a:t>Exportwaarde ontleden in prijs en volume</a:t>
             </a:r>
+          </a:p>
+          <a:p>
             <a:pPr algn="l" marL="342900" indent="-342900">
               <a:lnSpc>
                 <a:spcPct val="150000"/>
@@ -5049,6 +5190,8 @@
               </a:rPr>
               <a:t>Effecten van handelspolitiek stapsgewijs beschrijven</a:t>
             </a:r>
+          </a:p>
+          <a:p>
             <a:pPr algn="l" marL="342900" indent="-342900">
               <a:lnSpc>
                 <a:spcPct val="150000"/>
@@ -5070,7 +5213,6 @@
               </a:rPr>
               <a:t>Globalisering koppelen aan de arbeidsmarkt</a:t>
             </a:r>
-            <a:endParaRPr lang="en-US" sz="1500" dirty="0"/>
           </a:p>
         </p:txBody>
       </p:sp>
@@ -6635,6 +6777,10 @@
             </a:outerShdw>
           </a:effectLst>
         </p:spPr>
+        <p:txBody>
+          <a:bodyPr/>
+          <a:p/>
+        </p:txBody>
       </p:sp>
       <p:sp>
         <p:nvSpPr>
@@ -6747,6 +6893,10 @@
             </a:outerShdw>
           </a:effectLst>
         </p:spPr>
+        <p:txBody>
+          <a:bodyPr/>
+          <a:p/>
+        </p:txBody>
       </p:sp>
       <p:sp>
         <p:nvSpPr>
@@ -6859,6 +7009,10 @@
             </a:outerShdw>
           </a:effectLst>
         </p:spPr>
+        <p:txBody>
+          <a:bodyPr/>
+          <a:p/>
+        </p:txBody>
       </p:sp>
       <p:sp>
         <p:nvSpPr>
@@ -6971,6 +7125,10 @@
             </a:outerShdw>
           </a:effectLst>
         </p:spPr>
+        <p:txBody>
+          <a:bodyPr/>
+          <a:p/>
+        </p:txBody>
       </p:sp>
       <p:sp>
         <p:nvSpPr>
@@ -7032,6 +7190,10 @@
           </a:solidFill>
           <a:ln/>
         </p:spPr>
+        <p:txBody>
+          <a:bodyPr/>
+          <a:p/>
+        </p:txBody>
       </p:sp>
       <p:sp>
         <p:nvSpPr>
@@ -7052,6 +7214,10 @@
           </a:solidFill>
           <a:ln/>
         </p:spPr>
+        <p:txBody>
+          <a:bodyPr/>
+          <a:p/>
+        </p:txBody>
       </p:sp>
       <p:sp>
         <p:nvSpPr>
@@ -7191,6 +7357,10 @@
           </a:solidFill>
           <a:ln/>
         </p:spPr>
+        <p:txBody>
+          <a:bodyPr/>
+          <a:p/>
+        </p:txBody>
       </p:sp>
       <p:sp>
         <p:nvSpPr>
@@ -7211,6 +7381,10 @@
           </a:solidFill>
           <a:ln/>
         </p:spPr>
+        <p:txBody>
+          <a:bodyPr/>
+          <a:p/>
+        </p:txBody>
       </p:sp>
       <p:sp>
         <p:nvSpPr>
@@ -7279,6 +7453,10 @@
             </a:outerShdw>
           </a:effectLst>
         </p:spPr>
+        <p:txBody>
+          <a:bodyPr/>
+          <a:p/>
+        </p:txBody>
       </p:sp>
       <p:sp>
         <p:nvSpPr>
@@ -7299,6 +7477,10 @@
           </a:solidFill>
           <a:ln/>
         </p:spPr>
+        <p:txBody>
+          <a:bodyPr/>
+          <a:p/>
+        </p:txBody>
       </p:sp>
       <p:sp>
         <p:nvSpPr>
@@ -7517,6 +7699,10 @@
             </a:outerShdw>
           </a:effectLst>
         </p:spPr>
+        <p:txBody>
+          <a:bodyPr/>
+          <a:p/>
+        </p:txBody>
       </p:sp>
       <p:sp>
         <p:nvSpPr>
@@ -7537,6 +7723,10 @@
           </a:solidFill>
           <a:ln/>
         </p:spPr>
+        <p:txBody>
+          <a:bodyPr/>
+          <a:p/>
+        </p:txBody>
       </p:sp>
       <p:sp>
         <p:nvSpPr>
@@ -7819,6 +8009,10 @@
             </a:outerShdw>
           </a:effectLst>
         </p:spPr>
+        <p:txBody>
+          <a:bodyPr/>
+          <a:p/>
+        </p:txBody>
       </p:sp>
       <p:sp>
         <p:nvSpPr>
@@ -7839,6 +8033,10 @@
           </a:solidFill>
           <a:ln/>
         </p:spPr>
+        <p:txBody>
+          <a:bodyPr/>
+          <a:p/>
+        </p:txBody>
       </p:sp>
       <p:sp>
         <p:nvSpPr>
@@ -8004,6 +8202,10 @@
             </a:outerShdw>
           </a:effectLst>
         </p:spPr>
+        <p:txBody>
+          <a:bodyPr/>
+          <a:p/>
+        </p:txBody>
       </p:sp>
       <p:sp>
         <p:nvSpPr>
@@ -8024,6 +8226,10 @@
           </a:solidFill>
           <a:ln/>
         </p:spPr>
+        <p:txBody>
+          <a:bodyPr/>
+          <a:p/>
+        </p:txBody>
       </p:sp>
       <p:sp>
         <p:nvSpPr>
@@ -8189,6 +8395,10 @@
             </a:outerShdw>
           </a:effectLst>
         </p:spPr>
+        <p:txBody>
+          <a:bodyPr/>
+          <a:p/>
+        </p:txBody>
       </p:sp>
       <p:sp>
         <p:nvSpPr>
@@ -8209,6 +8419,10 @@
           </a:solidFill>
           <a:ln/>
         </p:spPr>
+        <p:txBody>
+          <a:bodyPr/>
+          <a:p/>
+        </p:txBody>
       </p:sp>
       <p:sp>
         <p:nvSpPr>
@@ -8408,6 +8622,10 @@
             </a:outerShdw>
           </a:effectLst>
         </p:spPr>
+        <p:txBody>
+          <a:bodyPr/>
+          <a:p/>
+        </p:txBody>
       </p:sp>
       <p:sp>
         <p:nvSpPr>
@@ -8520,6 +8738,10 @@
             </a:outerShdw>
           </a:effectLst>
         </p:spPr>
+        <p:txBody>
+          <a:bodyPr/>
+          <a:p/>
+        </p:txBody>
       </p:sp>
       <p:sp>
         <p:nvSpPr>
@@ -8632,6 +8854,10 @@
             </a:outerShdw>
           </a:effectLst>
         </p:spPr>
+        <p:txBody>
+          <a:bodyPr/>
+          <a:p/>
+        </p:txBody>
       </p:sp>
       <p:sp>
         <p:nvSpPr>
@@ -8744,6 +8970,10 @@
             </a:outerShdw>
           </a:effectLst>
         </p:spPr>
+        <p:txBody>
+          <a:bodyPr/>
+          <a:p/>
+        </p:txBody>
       </p:sp>
       <p:sp>
         <p:nvSpPr>
@@ -8929,6 +9159,10 @@
             </a:outerShdw>
           </a:effectLst>
         </p:spPr>
+        <p:txBody>
+          <a:bodyPr/>
+          <a:p/>
+        </p:txBody>
       </p:sp>
       <p:sp>
         <p:nvSpPr>
@@ -8949,6 +9183,10 @@
           </a:solidFill>
           <a:ln/>
         </p:spPr>
+        <p:txBody>
+          <a:bodyPr/>
+          <a:p/>
+        </p:txBody>
       </p:sp>
       <p:sp>
         <p:nvSpPr>
@@ -9164,6 +9402,10 @@
             </a:outerShdw>
           </a:effectLst>
         </p:spPr>
+        <p:txBody>
+          <a:bodyPr/>
+          <a:p/>
+        </p:txBody>
       </p:sp>
       <p:sp>
         <p:nvSpPr>
@@ -9184,6 +9426,10 @@
           </a:solidFill>
           <a:ln/>
         </p:spPr>
+        <p:txBody>
+          <a:bodyPr/>
+          <a:p/>
+        </p:txBody>
       </p:sp>
       <p:sp>
         <p:nvSpPr>
